--- a/docs/downloads/OpenvSwitch-Configuration-Guide.pptx
+++ b/docs/downloads/OpenvSwitch-Configuration-Guide.pptx
@@ -318,7 +318,7 @@
               <a:pPr>
                 <a:defRPr/>
               </a:pPr>
-              <a:t>2025. 5. 12.</a:t>
+              <a:t>2026. 1. 22.</a:t>
             </a:fld>
             <a:endParaRPr lang="ko-KR" altLang="en-US" dirty="0"/>
           </a:p>
@@ -525,7 +525,7 @@
               <a:pPr>
                 <a:defRPr/>
               </a:pPr>
-              <a:t>2025. 5. 12.</a:t>
+              <a:t>2026. 1. 22.</a:t>
             </a:fld>
             <a:endParaRPr lang="ko-KR" altLang="en-US" dirty="0"/>
           </a:p>
@@ -3302,7 +3302,7 @@
           <a:p>
             <a:fld id="{7288D4FF-07C0-40A4-BFCE-890C8EE1CB20}" type="datetimeFigureOut">
               <a:rPr lang="ko-KR" altLang="en-US" smtClean="0"/>
-              <a:t>2025. 5. 12.</a:t>
+              <a:t>2026. 1. 22.</a:t>
             </a:fld>
             <a:endParaRPr lang="ko-KR" altLang="en-US"/>
           </a:p>
@@ -11742,14 +11742,28 @@
                 <a:effectLst/>
                 <a:latin typeface="Helvetica Neue" panose="02000503000000020004" pitchFamily="2" charset="0"/>
               </a:rPr>
-              <a:t>본딩</a:t>
+              <a:t>본딩에</a:t>
             </a:r>
             <a:r>
               <a:rPr lang="ko-KR" altLang="en-US" sz="1100" dirty="0">
                 <a:effectLst/>
                 <a:latin typeface="Helvetica Neue" panose="02000503000000020004" pitchFamily="2" charset="0"/>
               </a:rPr>
-              <a:t> 모드 설정 </a:t>
+              <a:t> 물리 </a:t>
+            </a:r>
+            <a:r>
+              <a:rPr lang="en" altLang="ko-KR" sz="1100" dirty="0">
+                <a:effectLst/>
+                <a:latin typeface="Helvetica Neue" panose="02000503000000020004" pitchFamily="2" charset="0"/>
+              </a:rPr>
+              <a:t>NIC </a:t>
+            </a:r>
+            <a:r>
+              <a:rPr lang="ko-KR" altLang="en-US" sz="1100" dirty="0">
+                <a:effectLst/>
+                <a:latin typeface="Helvetica Neue" panose="02000503000000020004" pitchFamily="2" charset="0"/>
+              </a:rPr>
+              <a:t>추가 </a:t>
             </a:r>
             <a:r>
               <a:rPr lang="en-US" altLang="ko-KR" sz="1100" dirty="0">
@@ -11759,18 +11773,25 @@
               <a:t>(</a:t>
             </a:r>
             <a:r>
+              <a:rPr lang="ko-KR" altLang="en-US" sz="1100" dirty="0">
+                <a:effectLst/>
+                <a:latin typeface="Helvetica Neue" panose="02000503000000020004" pitchFamily="2" charset="0"/>
+              </a:rPr>
+              <a:t>여기에 </a:t>
+            </a:r>
+            <a:r>
               <a:rPr lang="en" altLang="ko-KR" sz="1100" dirty="0">
                 <a:effectLst/>
                 <a:latin typeface="Helvetica Neue" panose="02000503000000020004" pitchFamily="2" charset="0"/>
               </a:rPr>
-              <a:t>active-backup </a:t>
+              <a:t>ens1f0np0, ens1f1np0 </a:t>
             </a:r>
             <a:r>
               <a:rPr lang="ko-KR" altLang="en-US" sz="1100" dirty="0">
                 <a:effectLst/>
                 <a:latin typeface="Helvetica Neue" panose="02000503000000020004" pitchFamily="2" charset="0"/>
               </a:rPr>
-              <a:t>모드</a:t>
+              <a:t>같은 카드들을 연결</a:t>
             </a:r>
             <a:r>
               <a:rPr lang="en-US" altLang="ko-KR" sz="1100" dirty="0">
@@ -11793,133 +11814,57 @@
                 <a:effectLst/>
                 <a:latin typeface="Helvetica Neue" panose="02000503000000020004" pitchFamily="2" charset="0"/>
               </a:rPr>
-              <a:t> con modify ovs-bond0 </a:t>
+              <a:t> con add type ethernet </a:t>
             </a:r>
             <a:r>
               <a:rPr lang="en" altLang="ko-KR" sz="1100" dirty="0" err="1">
                 <a:effectLst/>
                 <a:latin typeface="Helvetica Neue" panose="02000503000000020004" pitchFamily="2" charset="0"/>
               </a:rPr>
-              <a:t>ovs</a:t>
+              <a:t>conn.interface</a:t>
             </a:r>
             <a:r>
               <a:rPr lang="en" altLang="ko-KR" sz="1100" dirty="0">
                 <a:effectLst/>
                 <a:latin typeface="Helvetica Neue" panose="02000503000000020004" pitchFamily="2" charset="0"/>
               </a:rPr>
-              <a:t>-</a:t>
-            </a:r>
+              <a:t> ens1f0np0 master ovs-bond0 con-name ovs-slave-ens1f0np0</a:t>
+            </a:r>
+          </a:p>
+          <a:p>
             <a:r>
               <a:rPr lang="en" altLang="ko-KR" sz="1100" dirty="0" err="1">
                 <a:effectLst/>
                 <a:latin typeface="Helvetica Neue" panose="02000503000000020004" pitchFamily="2" charset="0"/>
               </a:rPr>
-              <a:t>port.bond</a:t>
+              <a:t>nmcli</a:t>
             </a:r>
             <a:r>
               <a:rPr lang="en" altLang="ko-KR" sz="1100" dirty="0">
                 <a:effectLst/>
                 <a:latin typeface="Helvetica Neue" panose="02000503000000020004" pitchFamily="2" charset="0"/>
               </a:rPr>
-              <a:t>-mode active-backup</a:t>
-            </a:r>
-          </a:p>
-          <a:p>
+              <a:t> con add type ethernet </a:t>
+            </a:r>
             <a:r>
               <a:rPr lang="en" altLang="ko-KR" sz="1100" dirty="0" err="1">
                 <a:effectLst/>
                 <a:latin typeface="Helvetica Neue" panose="02000503000000020004" pitchFamily="2" charset="0"/>
               </a:rPr>
-              <a:t>nmcli</a:t>
+              <a:t>conn.interface</a:t>
             </a:r>
             <a:r>
               <a:rPr lang="en" altLang="ko-KR" sz="1100" dirty="0">
                 <a:effectLst/>
                 <a:latin typeface="Helvetica Neue" panose="02000503000000020004" pitchFamily="2" charset="0"/>
               </a:rPr>
-              <a:t> con modify ovs-bond0 </a:t>
-            </a:r>
-            <a:r>
-              <a:rPr lang="en" altLang="ko-KR" sz="1100" dirty="0" err="1">
-                <a:effectLst/>
-                <a:latin typeface="Helvetica Neue" panose="02000503000000020004" pitchFamily="2" charset="0"/>
-              </a:rPr>
-              <a:t>ovs-port.bond-updelay</a:t>
-            </a:r>
-            <a:r>
-              <a:rPr lang="en" altLang="ko-KR" sz="1100" dirty="0">
-                <a:effectLst/>
-                <a:latin typeface="Helvetica Neue" panose="02000503000000020004" pitchFamily="2" charset="0"/>
-              </a:rPr>
-              <a:t> 0</a:t>
-            </a:r>
-          </a:p>
-          <a:p>
-            <a:r>
-              <a:rPr lang="en" altLang="ko-KR" sz="1100" dirty="0" err="1">
-                <a:effectLst/>
-                <a:latin typeface="Helvetica Neue" panose="02000503000000020004" pitchFamily="2" charset="0"/>
-              </a:rPr>
-              <a:t>nmcli</a:t>
-            </a:r>
-            <a:r>
-              <a:rPr lang="en" altLang="ko-KR" sz="1100" dirty="0">
-                <a:effectLst/>
-                <a:latin typeface="Helvetica Neue" panose="02000503000000020004" pitchFamily="2" charset="0"/>
-              </a:rPr>
-              <a:t> con modify ovs-bond0 </a:t>
-            </a:r>
-            <a:r>
-              <a:rPr lang="en" altLang="ko-KR" sz="1100" dirty="0" err="1">
-                <a:effectLst/>
-                <a:latin typeface="Helvetica Neue" panose="02000503000000020004" pitchFamily="2" charset="0"/>
-              </a:rPr>
-              <a:t>ovs-port.bond-downdelay</a:t>
-            </a:r>
-            <a:r>
-              <a:rPr lang="en" altLang="ko-KR" sz="1100" dirty="0">
-                <a:effectLst/>
-                <a:latin typeface="Helvetica Neue" panose="02000503000000020004" pitchFamily="2" charset="0"/>
-              </a:rPr>
-              <a:t> 0</a:t>
-            </a:r>
-          </a:p>
-          <a:p>
-            <a:r>
-              <a:rPr lang="en" altLang="ko-KR" sz="1100" dirty="0" err="1">
-                <a:effectLst/>
-                <a:latin typeface="Helvetica Neue" panose="02000503000000020004" pitchFamily="2" charset="0"/>
-              </a:rPr>
-              <a:t>ovs-vsctl</a:t>
-            </a:r>
-            <a:r>
-              <a:rPr lang="en" altLang="ko-KR" sz="1100" dirty="0">
-                <a:effectLst/>
-                <a:latin typeface="Helvetica Neue" panose="02000503000000020004" pitchFamily="2" charset="0"/>
-              </a:rPr>
-              <a:t> set port ovs-bond0 </a:t>
-            </a:r>
-            <a:r>
-              <a:rPr lang="en" altLang="ko-KR" sz="1100" dirty="0" err="1">
-                <a:effectLst/>
-                <a:latin typeface="Helvetica Neue" panose="02000503000000020004" pitchFamily="2" charset="0"/>
-              </a:rPr>
-              <a:t>other_config:bond-detect-mode</a:t>
-            </a:r>
-            <a:r>
-              <a:rPr lang="en" altLang="ko-KR" sz="1100" dirty="0">
-                <a:effectLst/>
-                <a:latin typeface="Helvetica Neue" panose="02000503000000020004" pitchFamily="2" charset="0"/>
-              </a:rPr>
-              <a:t>=</a:t>
-            </a:r>
-            <a:r>
-              <a:rPr lang="en" altLang="ko-KR" sz="1100" dirty="0" err="1">
-                <a:effectLst/>
-                <a:latin typeface="Helvetica Neue" panose="02000503000000020004" pitchFamily="2" charset="0"/>
-              </a:rPr>
-              <a:t>miimon</a:t>
-            </a:r>
+              <a:t> ens1f1np0 master ovs-bond0 con-name ovs-slave-ens1f1np1</a:t>
+            </a:r>
+            <a:endParaRPr lang="en" altLang="ko-KR" sz="1100" dirty="0">
+              <a:latin typeface="Helvetica Neue" panose="02000503000000020004" pitchFamily="2" charset="0"/>
+            </a:endParaRPr>
+          </a:p>
+          <a:p>
             <a:endParaRPr lang="en" altLang="ko-KR" sz="1100" dirty="0">
               <a:effectLst/>
               <a:latin typeface="Helvetica Neue" panose="02000503000000020004" pitchFamily="2" charset="0"/>
@@ -11927,10 +11872,165 @@
           </a:p>
           <a:p>
             <a:r>
+              <a:rPr lang="en" altLang="ko-KR" sz="1100" dirty="0">
+                <a:effectLst/>
+                <a:latin typeface="Helvetica Neue" panose="02000503000000020004" pitchFamily="2" charset="0"/>
+              </a:rPr>
+              <a:t># 6. </a:t>
+            </a:r>
+            <a:r>
+              <a:rPr lang="ko-KR" altLang="en-US" sz="1100" dirty="0" err="1">
+                <a:effectLst/>
+                <a:latin typeface="Helvetica Neue" panose="02000503000000020004" pitchFamily="2" charset="0"/>
+              </a:rPr>
+              <a:t>본딩</a:t>
+            </a:r>
+            <a:r>
+              <a:rPr lang="ko-KR" altLang="en-US" sz="1100" dirty="0">
+                <a:effectLst/>
+                <a:latin typeface="Helvetica Neue" panose="02000503000000020004" pitchFamily="2" charset="0"/>
+              </a:rPr>
+              <a:t> 모드 설정 </a:t>
+            </a:r>
+            <a:r>
+              <a:rPr lang="en-US" altLang="ko-KR" sz="1100" dirty="0">
+                <a:effectLst/>
+                <a:latin typeface="Helvetica Neue" panose="02000503000000020004" pitchFamily="2" charset="0"/>
+              </a:rPr>
+              <a:t>(</a:t>
+            </a:r>
+            <a:r>
+              <a:rPr lang="en" altLang="ko-KR" sz="1100" dirty="0">
+                <a:effectLst/>
+                <a:latin typeface="Helvetica Neue" panose="02000503000000020004" pitchFamily="2" charset="0"/>
+              </a:rPr>
+              <a:t>active-backup </a:t>
+            </a:r>
+            <a:r>
+              <a:rPr lang="ko-KR" altLang="en-US" sz="1100" dirty="0">
+                <a:effectLst/>
+                <a:latin typeface="Helvetica Neue" panose="02000503000000020004" pitchFamily="2" charset="0"/>
+              </a:rPr>
+              <a:t>모드</a:t>
+            </a:r>
+            <a:r>
+              <a:rPr lang="en-US" altLang="ko-KR" sz="1100" dirty="0">
+                <a:effectLst/>
+                <a:latin typeface="Helvetica Neue" panose="02000503000000020004" pitchFamily="2" charset="0"/>
+              </a:rPr>
+              <a:t>)</a:t>
+            </a:r>
+          </a:p>
+          <a:p>
+            <a:r>
               <a:rPr lang="en" altLang="ko-KR" sz="1100" dirty="0" err="1">
                 <a:effectLst/>
                 <a:latin typeface="Helvetica Neue" panose="02000503000000020004" pitchFamily="2" charset="0"/>
               </a:rPr>
+              <a:t>nmcli</a:t>
+            </a:r>
+            <a:r>
+              <a:rPr lang="en" altLang="ko-KR" sz="1100" dirty="0">
+                <a:effectLst/>
+                <a:latin typeface="Helvetica Neue" panose="02000503000000020004" pitchFamily="2" charset="0"/>
+              </a:rPr>
+              <a:t> con modify ovs-bond0 </a:t>
+            </a:r>
+            <a:r>
+              <a:rPr lang="en" altLang="ko-KR" sz="1100" dirty="0" err="1">
+                <a:effectLst/>
+                <a:latin typeface="Helvetica Neue" panose="02000503000000020004" pitchFamily="2" charset="0"/>
+              </a:rPr>
+              <a:t>ovs</a:t>
+            </a:r>
+            <a:r>
+              <a:rPr lang="en" altLang="ko-KR" sz="1100" dirty="0">
+                <a:effectLst/>
+                <a:latin typeface="Helvetica Neue" panose="02000503000000020004" pitchFamily="2" charset="0"/>
+              </a:rPr>
+              <a:t>-</a:t>
+            </a:r>
+            <a:r>
+              <a:rPr lang="en" altLang="ko-KR" sz="1100" dirty="0" err="1">
+                <a:effectLst/>
+                <a:latin typeface="Helvetica Neue" panose="02000503000000020004" pitchFamily="2" charset="0"/>
+              </a:rPr>
+              <a:t>port.bond</a:t>
+            </a:r>
+            <a:r>
+              <a:rPr lang="en" altLang="ko-KR" sz="1100" dirty="0">
+                <a:effectLst/>
+                <a:latin typeface="Helvetica Neue" panose="02000503000000020004" pitchFamily="2" charset="0"/>
+              </a:rPr>
+              <a:t>-mode active-backup</a:t>
+            </a:r>
+          </a:p>
+          <a:p>
+            <a:r>
+              <a:rPr lang="en" altLang="ko-KR" sz="1100" dirty="0" err="1">
+                <a:effectLst/>
+                <a:latin typeface="Helvetica Neue" panose="02000503000000020004" pitchFamily="2" charset="0"/>
+              </a:rPr>
+              <a:t>nmcli</a:t>
+            </a:r>
+            <a:r>
+              <a:rPr lang="en" altLang="ko-KR" sz="1100" dirty="0">
+                <a:effectLst/>
+                <a:latin typeface="Helvetica Neue" panose="02000503000000020004" pitchFamily="2" charset="0"/>
+              </a:rPr>
+              <a:t> con modify ovs-bond0 </a:t>
+            </a:r>
+            <a:r>
+              <a:rPr lang="en" altLang="ko-KR" sz="1100" dirty="0" err="1">
+                <a:effectLst/>
+                <a:latin typeface="Helvetica Neue" panose="02000503000000020004" pitchFamily="2" charset="0"/>
+              </a:rPr>
+              <a:t>ovs-port.bond-updelay</a:t>
+            </a:r>
+            <a:r>
+              <a:rPr lang="en" altLang="ko-KR" sz="1100" dirty="0">
+                <a:effectLst/>
+                <a:latin typeface="Helvetica Neue" panose="02000503000000020004" pitchFamily="2" charset="0"/>
+              </a:rPr>
+              <a:t> 0</a:t>
+            </a:r>
+          </a:p>
+          <a:p>
+            <a:r>
+              <a:rPr lang="en" altLang="ko-KR" sz="1100" dirty="0" err="1">
+                <a:effectLst/>
+                <a:latin typeface="Helvetica Neue" panose="02000503000000020004" pitchFamily="2" charset="0"/>
+              </a:rPr>
+              <a:t>nmcli</a:t>
+            </a:r>
+            <a:r>
+              <a:rPr lang="en" altLang="ko-KR" sz="1100" dirty="0">
+                <a:effectLst/>
+                <a:latin typeface="Helvetica Neue" panose="02000503000000020004" pitchFamily="2" charset="0"/>
+              </a:rPr>
+              <a:t> con modify ovs-bond0 </a:t>
+            </a:r>
+            <a:r>
+              <a:rPr lang="en" altLang="ko-KR" sz="1100" dirty="0" err="1">
+                <a:effectLst/>
+                <a:latin typeface="Helvetica Neue" panose="02000503000000020004" pitchFamily="2" charset="0"/>
+              </a:rPr>
+              <a:t>ovs-port.bond-downdelay</a:t>
+            </a:r>
+            <a:r>
+              <a:rPr lang="en" altLang="ko-KR" sz="1100" dirty="0">
+                <a:effectLst/>
+                <a:latin typeface="Helvetica Neue" panose="02000503000000020004" pitchFamily="2" charset="0"/>
+              </a:rPr>
+              <a:t> 0</a:t>
+            </a:r>
+          </a:p>
+          <a:p>
+            <a:r>
+              <a:rPr lang="en" altLang="ko-KR" sz="1100" dirty="0" err="1">
+                <a:effectLst/>
+                <a:latin typeface="Helvetica Neue" panose="02000503000000020004" pitchFamily="2" charset="0"/>
+              </a:rPr>
               <a:t>ovs-vsctl</a:t>
             </a:r>
             <a:r>
@@ -11945,105 +12045,56 @@
                 <a:effectLst/>
                 <a:latin typeface="Helvetica Neue" panose="02000503000000020004" pitchFamily="2" charset="0"/>
               </a:rPr>
-              <a:t>other_config:miimon</a:t>
+              <a:t>other_config:bond-detect-mode</a:t>
             </a:r>
             <a:r>
               <a:rPr lang="en" altLang="ko-KR" sz="1100" dirty="0">
                 <a:effectLst/>
                 <a:latin typeface="Helvetica Neue" panose="02000503000000020004" pitchFamily="2" charset="0"/>
               </a:rPr>
-              <a:t>=100</a:t>
-            </a:r>
-          </a:p>
-          <a:p>
+              <a:t>=</a:t>
+            </a:r>
+            <a:r>
+              <a:rPr lang="en" altLang="ko-KR" sz="1100" dirty="0" err="1">
+                <a:effectLst/>
+                <a:latin typeface="Helvetica Neue" panose="02000503000000020004" pitchFamily="2" charset="0"/>
+              </a:rPr>
+              <a:t>miimon</a:t>
+            </a:r>
             <a:endParaRPr lang="en" altLang="ko-KR" sz="1100" dirty="0">
               <a:effectLst/>
               <a:latin typeface="Helvetica Neue" panose="02000503000000020004" pitchFamily="2" charset="0"/>
             </a:endParaRPr>
           </a:p>
           <a:p>
-            <a:pPr marR="0" defTabSz="914400" eaLnBrk="1" fontAlgn="auto" latinLnBrk="0" hangingPunct="1">
-              <a:lnSpc>
-                <a:spcPts val="1400"/>
-              </a:lnSpc>
-              <a:spcBef>
-                <a:spcPts val="0"/>
-              </a:spcBef>
-              <a:spcAft>
-                <a:spcPts val="300"/>
-              </a:spcAft>
-              <a:buClr>
-                <a:srgbClr val="808080"/>
-              </a:buClr>
-              <a:buSzPct val="80000"/>
-              <a:tabLst/>
-            </a:pPr>
-            <a:r>
-              <a:rPr kumimoji="0" lang="ko-KR" altLang="en-US" sz="1100" b="1" kern="0" dirty="0" err="1">
-                <a:solidFill>
-                  <a:sysClr val="windowText" lastClr="000000"/>
-                </a:solidFill>
-                <a:latin typeface="+mn-lt"/>
-                <a:ea typeface="+mn-ea"/>
-              </a:rPr>
-              <a:t>본딩</a:t>
-            </a:r>
-            <a:r>
-              <a:rPr kumimoji="0" lang="ko-KR" altLang="en-US" sz="1100" b="1" kern="0" dirty="0">
-                <a:solidFill>
-                  <a:sysClr val="windowText" lastClr="000000"/>
-                </a:solidFill>
-                <a:latin typeface="+mn-lt"/>
-                <a:ea typeface="+mn-ea"/>
-              </a:rPr>
-              <a:t> 설정 확인</a:t>
-            </a:r>
-            <a:br>
-              <a:rPr kumimoji="0" lang="en-US" altLang="ko-KR" sz="1100" b="1" kern="0" dirty="0">
-                <a:solidFill>
-                  <a:sysClr val="windowText" lastClr="000000"/>
-                </a:solidFill>
-                <a:latin typeface="+mn-lt"/>
-                <a:ea typeface="+mn-ea"/>
-              </a:rPr>
-            </a:br>
-            <a:r>
-              <a:rPr kumimoji="0" lang="en-US" altLang="ko-KR" sz="1100" b="1" kern="0" dirty="0" err="1">
-                <a:solidFill>
-                  <a:sysClr val="windowText" lastClr="000000"/>
-                </a:solidFill>
-                <a:latin typeface="+mn-lt"/>
-                <a:ea typeface="+mn-ea"/>
+            <a:r>
+              <a:rPr lang="en" altLang="ko-KR" sz="1100" dirty="0" err="1">
+                <a:effectLst/>
+                <a:latin typeface="Helvetica Neue" panose="02000503000000020004" pitchFamily="2" charset="0"/>
               </a:rPr>
               <a:t>ovs-vsctl</a:t>
             </a:r>
             <a:r>
-              <a:rPr kumimoji="0" lang="en-US" altLang="ko-KR" sz="1100" b="1" kern="0" dirty="0">
-                <a:solidFill>
-                  <a:sysClr val="windowText" lastClr="000000"/>
-                </a:solidFill>
-                <a:latin typeface="+mn-lt"/>
-                <a:ea typeface="+mn-ea"/>
-              </a:rPr>
-              <a:t> get port ovs-bond0 </a:t>
-            </a:r>
-            <a:r>
-              <a:rPr kumimoji="0" lang="en-US" altLang="ko-KR" sz="1100" b="1" kern="0" dirty="0" err="1">
-                <a:solidFill>
-                  <a:sysClr val="windowText" lastClr="000000"/>
-                </a:solidFill>
-                <a:latin typeface="+mn-lt"/>
-                <a:ea typeface="+mn-ea"/>
-              </a:rPr>
-              <a:t>other_config</a:t>
-            </a:r>
-            <a:endParaRPr kumimoji="0" lang="ko-KR" altLang="en-US" sz="1100" b="1" kern="0" dirty="0">
-              <a:solidFill>
-                <a:sysClr val="windowText" lastClr="000000"/>
-              </a:solidFill>
-              <a:latin typeface="+mn-lt"/>
-              <a:ea typeface="+mn-ea"/>
-            </a:endParaRPr>
+              <a:rPr lang="en" altLang="ko-KR" sz="1100" dirty="0">
+                <a:effectLst/>
+                <a:latin typeface="Helvetica Neue" panose="02000503000000020004" pitchFamily="2" charset="0"/>
+              </a:rPr>
+              <a:t> set port ovs-bond0 </a:t>
+            </a:r>
+            <a:r>
+              <a:rPr lang="en" altLang="ko-KR" sz="1100" dirty="0" err="1">
+                <a:effectLst/>
+                <a:latin typeface="Helvetica Neue" panose="02000503000000020004" pitchFamily="2" charset="0"/>
+              </a:rPr>
+              <a:t>other_config:miimon</a:t>
+            </a:r>
+            <a:r>
+              <a:rPr lang="en" altLang="ko-KR" sz="1100" dirty="0">
+                <a:effectLst/>
+                <a:latin typeface="Helvetica Neue" panose="02000503000000020004" pitchFamily="2" charset="0"/>
+              </a:rPr>
+              <a:t>=100</a:t>
+            </a:r>
           </a:p>
         </p:txBody>
       </p:sp>
@@ -12083,135 +12134,73 @@
           <a:lstStyle/>
           <a:p>
             <a:r>
-              <a:rPr lang="en" altLang="ko-KR" sz="1100" dirty="0">
-                <a:effectLst/>
-                <a:latin typeface="Helvetica Neue" panose="02000503000000020004" pitchFamily="2" charset="0"/>
-              </a:rPr>
-              <a:t># 6. </a:t>
-            </a:r>
-            <a:r>
-              <a:rPr lang="ko-KR" altLang="en-US" sz="1100" dirty="0" err="1">
-                <a:effectLst/>
-                <a:latin typeface="Helvetica Neue" panose="02000503000000020004" pitchFamily="2" charset="0"/>
-              </a:rPr>
-              <a:t>본딩에</a:t>
-            </a:r>
-            <a:r>
-              <a:rPr lang="ko-KR" altLang="en-US" sz="1100" dirty="0">
-                <a:effectLst/>
-                <a:latin typeface="Helvetica Neue" panose="02000503000000020004" pitchFamily="2" charset="0"/>
-              </a:rPr>
-              <a:t> 물리 </a:t>
-            </a:r>
-            <a:r>
-              <a:rPr lang="en" altLang="ko-KR" sz="1100" dirty="0">
-                <a:effectLst/>
-                <a:latin typeface="Helvetica Neue" panose="02000503000000020004" pitchFamily="2" charset="0"/>
-              </a:rPr>
-              <a:t>NIC </a:t>
-            </a:r>
-            <a:r>
-              <a:rPr lang="ko-KR" altLang="en-US" sz="1100" dirty="0">
-                <a:effectLst/>
-                <a:latin typeface="Helvetica Neue" panose="02000503000000020004" pitchFamily="2" charset="0"/>
-              </a:rPr>
-              <a:t>추가 </a:t>
-            </a:r>
-            <a:r>
-              <a:rPr lang="en-US" altLang="ko-KR" sz="1100" dirty="0">
-                <a:effectLst/>
-                <a:latin typeface="Helvetica Neue" panose="02000503000000020004" pitchFamily="2" charset="0"/>
-              </a:rPr>
-              <a:t>(</a:t>
-            </a:r>
-            <a:r>
-              <a:rPr lang="ko-KR" altLang="en-US" sz="1100" dirty="0">
-                <a:effectLst/>
-                <a:latin typeface="Helvetica Neue" panose="02000503000000020004" pitchFamily="2" charset="0"/>
-              </a:rPr>
-              <a:t>여기에 </a:t>
-            </a:r>
-            <a:r>
-              <a:rPr lang="en" altLang="ko-KR" sz="1100" dirty="0">
-                <a:effectLst/>
-                <a:latin typeface="Helvetica Neue" panose="02000503000000020004" pitchFamily="2" charset="0"/>
-              </a:rPr>
-              <a:t>ens1f0np0, ens1f1np0 </a:t>
-            </a:r>
-            <a:r>
-              <a:rPr lang="ko-KR" altLang="en-US" sz="1100" dirty="0">
-                <a:effectLst/>
-                <a:latin typeface="Helvetica Neue" panose="02000503000000020004" pitchFamily="2" charset="0"/>
-              </a:rPr>
-              <a:t>같은 카드들을 연결</a:t>
-            </a:r>
-            <a:r>
-              <a:rPr lang="en-US" altLang="ko-KR" sz="1100" dirty="0">
-                <a:effectLst/>
-                <a:latin typeface="Helvetica Neue" panose="02000503000000020004" pitchFamily="2" charset="0"/>
-              </a:rPr>
-              <a:t>)</a:t>
-            </a:r>
-          </a:p>
-          <a:p>
-            <a:r>
-              <a:rPr lang="en" altLang="ko-KR" sz="1100" dirty="0" err="1">
-                <a:effectLst/>
-                <a:latin typeface="Helvetica Neue" panose="02000503000000020004" pitchFamily="2" charset="0"/>
-              </a:rPr>
-              <a:t>nmcli</a:t>
-            </a:r>
-            <a:r>
-              <a:rPr lang="en" altLang="ko-KR" sz="1100" dirty="0">
-                <a:effectLst/>
-                <a:latin typeface="Helvetica Neue" panose="02000503000000020004" pitchFamily="2" charset="0"/>
-              </a:rPr>
-              <a:t> con add type ethernet </a:t>
-            </a:r>
-            <a:r>
-              <a:rPr lang="en" altLang="ko-KR" sz="1100" dirty="0" err="1">
-                <a:effectLst/>
-                <a:latin typeface="Helvetica Neue" panose="02000503000000020004" pitchFamily="2" charset="0"/>
-              </a:rPr>
-              <a:t>conn.interface</a:t>
-            </a:r>
-            <a:r>
-              <a:rPr lang="en" altLang="ko-KR" sz="1100" dirty="0">
-                <a:effectLst/>
-                <a:latin typeface="Helvetica Neue" panose="02000503000000020004" pitchFamily="2" charset="0"/>
-              </a:rPr>
-              <a:t> ens1f0np0 master ovs-bond0 con-name ovs-slave-ens1f0np0</a:t>
-            </a:r>
-          </a:p>
-          <a:p>
-            <a:r>
-              <a:rPr lang="en" altLang="ko-KR" sz="1100" dirty="0" err="1">
-                <a:effectLst/>
-                <a:latin typeface="Helvetica Neue" panose="02000503000000020004" pitchFamily="2" charset="0"/>
-              </a:rPr>
-              <a:t>nmcli</a:t>
-            </a:r>
-            <a:r>
-              <a:rPr lang="en" altLang="ko-KR" sz="1100" dirty="0">
-                <a:effectLst/>
-                <a:latin typeface="Helvetica Neue" panose="02000503000000020004" pitchFamily="2" charset="0"/>
-              </a:rPr>
-              <a:t> con add type ethernet </a:t>
-            </a:r>
-            <a:r>
-              <a:rPr lang="en" altLang="ko-KR" sz="1100" dirty="0" err="1">
-                <a:effectLst/>
-                <a:latin typeface="Helvetica Neue" panose="02000503000000020004" pitchFamily="2" charset="0"/>
-              </a:rPr>
-              <a:t>conn.interface</a:t>
-            </a:r>
-            <a:r>
-              <a:rPr lang="en" altLang="ko-KR" sz="1100" dirty="0">
-                <a:effectLst/>
-                <a:latin typeface="Helvetica Neue" panose="02000503000000020004" pitchFamily="2" charset="0"/>
-              </a:rPr>
-              <a:t> ens1f1np0 master ovs-bond0 con-name ovs-slave-ens1f1np1</a:t>
-            </a:r>
+              <a:rPr kumimoji="0" lang="ko-KR" altLang="en-US" sz="1100" b="1" kern="0" dirty="0" err="1">
+                <a:solidFill>
+                  <a:sysClr val="windowText" lastClr="000000"/>
+                </a:solidFill>
+                <a:latin typeface="+mn-lt"/>
+                <a:ea typeface="+mn-ea"/>
+              </a:rPr>
+              <a:t>본딩</a:t>
+            </a:r>
+            <a:r>
+              <a:rPr kumimoji="0" lang="ko-KR" altLang="en-US" sz="1100" b="1" kern="0" dirty="0">
+                <a:solidFill>
+                  <a:sysClr val="windowText" lastClr="000000"/>
+                </a:solidFill>
+                <a:latin typeface="+mn-lt"/>
+                <a:ea typeface="+mn-ea"/>
+              </a:rPr>
+              <a:t> 설정 확인</a:t>
+            </a:r>
+            <a:br>
+              <a:rPr kumimoji="0" lang="en-US" altLang="ko-KR" sz="1100" b="1" kern="0" dirty="0">
+                <a:solidFill>
+                  <a:sysClr val="windowText" lastClr="000000"/>
+                </a:solidFill>
+                <a:latin typeface="+mn-lt"/>
+                <a:ea typeface="+mn-ea"/>
+              </a:rPr>
+            </a:br>
+            <a:r>
+              <a:rPr kumimoji="0" lang="en-US" altLang="ko-KR" sz="1100" b="1" kern="0" dirty="0" err="1">
+                <a:solidFill>
+                  <a:sysClr val="windowText" lastClr="000000"/>
+                </a:solidFill>
+                <a:latin typeface="+mn-lt"/>
+                <a:ea typeface="+mn-ea"/>
+              </a:rPr>
+              <a:t>ovs-vsctl</a:t>
+            </a:r>
+            <a:r>
+              <a:rPr kumimoji="0" lang="en-US" altLang="ko-KR" sz="1100" b="1" kern="0" dirty="0">
+                <a:solidFill>
+                  <a:sysClr val="windowText" lastClr="000000"/>
+                </a:solidFill>
+                <a:latin typeface="+mn-lt"/>
+                <a:ea typeface="+mn-ea"/>
+              </a:rPr>
+              <a:t> get port ovs-bond0 </a:t>
+            </a:r>
+            <a:r>
+              <a:rPr kumimoji="0" lang="en-US" altLang="ko-KR" sz="1100" b="1" kern="0" dirty="0" err="1">
+                <a:solidFill>
+                  <a:sysClr val="windowText" lastClr="000000"/>
+                </a:solidFill>
+                <a:latin typeface="+mn-lt"/>
+                <a:ea typeface="+mn-ea"/>
+              </a:rPr>
+              <a:t>other_config</a:t>
+            </a:r>
+            <a:endParaRPr kumimoji="0" lang="ko-KR" altLang="en-US" sz="1100" b="1" kern="0" dirty="0">
+              <a:solidFill>
+                <a:sysClr val="windowText" lastClr="000000"/>
+              </a:solidFill>
+              <a:latin typeface="+mn-lt"/>
+              <a:ea typeface="+mn-ea"/>
+            </a:endParaRPr>
+          </a:p>
+          <a:p>
             <a:br>
               <a:rPr lang="en" altLang="ko-KR" sz="1100" dirty="0">
                 <a:effectLst/>
